--- a/e2e/pptx/fixtures/smartart-build-reveal.pptx
+++ b/e2e/pptx/fixtures/smartart-build-reveal.pptx
@@ -1070,7 +1070,7 @@
                                         <p:tgtEl>
                                           <p:spTgt spid="87">
                                             <p:graphicEl>
-                                              <p:dgm id="{00000000-0000-4000-8000-000000000011}" bldStep="sp"/>
+                                              <a:dgm id="{00000000-0000-4000-8000-000000000011}" bldStep="sp"/>
                                             </p:graphicEl>
                                           </p:spTgt>
                                         </p:tgtEl>
@@ -1088,7 +1088,7 @@
                                         <p:tgtEl>
                                           <p:spTgt spid="87">
                                             <p:graphicEl>
-                                              <p:dgm id="{00000000-0000-4000-8000-000000000011}" bldStep="sp"/>
+                                              <a:dgm id="{00000000-0000-4000-8000-000000000011}" bldStep="sp"/>
                                             </p:graphicEl>
                                           </p:spTgt>
                                         </p:tgtEl>
@@ -1131,7 +1131,7 @@
                                         <p:tgtEl>
                                           <p:spTgt spid="87">
                                             <p:graphicEl>
-                                              <p:dgm id="{00000000-0000-4000-8000-000000000006}" bldStep="sp"/>
+                                              <a:dgm id="{00000000-0000-4000-8000-000000000006}" bldStep="sp"/>
                                             </p:graphicEl>
                                           </p:spTgt>
                                         </p:tgtEl>
@@ -1149,7 +1149,7 @@
                                         <p:tgtEl>
                                           <p:spTgt spid="87">
                                             <p:graphicEl>
-                                              <p:dgm id="{00000000-0000-4000-8000-000000000006}" bldStep="sp"/>
+                                              <a:dgm id="{00000000-0000-4000-8000-000000000006}" bldStep="sp"/>
                                             </p:graphicEl>
                                           </p:spTgt>
                                         </p:tgtEl>
@@ -1192,7 +1192,7 @@
                                         <p:tgtEl>
                                           <p:spTgt spid="87">
                                             <p:graphicEl>
-                                              <p:dgm id="{00000000-0000-4000-8000-000000000001}" bldStep="sp"/>
+                                              <a:dgm id="{00000000-0000-4000-8000-000000000001}" bldStep="sp"/>
                                             </p:graphicEl>
                                           </p:spTgt>
                                         </p:tgtEl>
@@ -1210,7 +1210,7 @@
                                         <p:tgtEl>
                                           <p:spTgt spid="87">
                                             <p:graphicEl>
-                                              <p:dgm id="{00000000-0000-4000-8000-000000000001}" bldStep="sp"/>
+                                              <a:dgm id="{00000000-0000-4000-8000-000000000001}" bldStep="sp"/>
                                             </p:graphicEl>
                                           </p:spTgt>
                                         </p:tgtEl>

--- a/e2e/pptx/fixtures/smartart-build-reveal.pptx
+++ b/e2e/pptx/fixtures/smartart-build-reveal.pptx
@@ -632,6 +632,126 @@
           <a:chExt cx="0" cy="0"/>
         </a:xfrm>
       </p:grpSpPr>
+      <p:sp>
+        <p:nvSpPr>
+          <p:cNvPr id="2" name="CtrTitle Placeholder 1"/>
+          <p:cNvSpPr>
+            <a:spLocks noGrp="1"/>
+          </p:cNvSpPr>
+          <p:nvPr>
+            <p:ph type="ctrTitle" idx="0"/>
+          </p:nvPr>
+        </p:nvSpPr>
+        <p:spPr>
+          <a:xfrm>
+            <a:off x="975360" y="1645920"/>
+            <a:ext cx="10241280" cy="1508760"/>
+          </a:xfrm>
+        </p:spPr>
+        <p:txBody>
+          <a:bodyPr/>
+          <a:lstStyle/>
+          <a:p>
+            <a:endParaRPr lang="en-US"/>
+          </a:p>
+        </p:txBody>
+      </p:sp>
+      <p:sp>
+        <p:nvSpPr>
+          <p:cNvPr id="3" name="SubTitle Placeholder 2"/>
+          <p:cNvSpPr>
+            <a:spLocks noGrp="1"/>
+          </p:cNvSpPr>
+          <p:nvPr>
+            <p:ph type="subTitle" idx="1"/>
+          </p:nvPr>
+        </p:nvSpPr>
+        <p:spPr>
+          <a:xfrm>
+            <a:off x="1463040" y="3360420"/>
+            <a:ext cx="9265920" cy="1371600"/>
+          </a:xfrm>
+        </p:spPr>
+        <p:txBody>
+          <a:bodyPr/>
+          <a:lstStyle/>
+          <a:p>
+            <a:endParaRPr lang="en-US"/>
+          </a:p>
+        </p:txBody>
+      </p:sp>
+      <p:sp>
+        <p:nvSpPr>
+          <p:cNvPr id="4" name="Dt Placeholder 3"/>
+          <p:cNvSpPr>
+            <a:spLocks noGrp="1"/>
+          </p:cNvSpPr>
+          <p:nvPr>
+            <p:ph type="dt" idx="10"/>
+          </p:nvPr>
+        </p:nvSpPr>
+        <p:spPr>
+          <a:xfrm>
+            <a:off x="609600" y="6309360"/>
+            <a:ext cx="3048000" cy="274320"/>
+          </a:xfrm>
+        </p:spPr>
+        <p:txBody>
+          <a:bodyPr/>
+          <a:lstStyle/>
+          <a:p>
+            <a:endParaRPr lang="en-US"/>
+          </a:p>
+        </p:txBody>
+      </p:sp>
+      <p:sp>
+        <p:nvSpPr>
+          <p:cNvPr id="5" name="Ftr Placeholder 4"/>
+          <p:cNvSpPr>
+            <a:spLocks noGrp="1"/>
+          </p:cNvSpPr>
+          <p:nvPr>
+            <p:ph type="ftr" idx="11"/>
+          </p:nvPr>
+        </p:nvSpPr>
+        <p:spPr>
+          <a:xfrm>
+            <a:off x="4023360" y="6309360"/>
+            <a:ext cx="4145280" cy="274320"/>
+          </a:xfrm>
+        </p:spPr>
+        <p:txBody>
+          <a:bodyPr/>
+          <a:lstStyle/>
+          <a:p>
+            <a:endParaRPr lang="en-US"/>
+          </a:p>
+        </p:txBody>
+      </p:sp>
+      <p:sp>
+        <p:nvSpPr>
+          <p:cNvPr id="6" name="SldNum Placeholder 5"/>
+          <p:cNvSpPr>
+            <a:spLocks noGrp="1"/>
+          </p:cNvSpPr>
+          <p:nvPr>
+            <p:ph type="sldNum" idx="12"/>
+          </p:nvPr>
+        </p:nvSpPr>
+        <p:spPr>
+          <a:xfrm>
+            <a:off x="9144000" y="6309360"/>
+            <a:ext cx="2438400" cy="274320"/>
+          </a:xfrm>
+        </p:spPr>
+        <p:txBody>
+          <a:bodyPr/>
+          <a:lstStyle/>
+          <a:p>
+            <a:endParaRPr lang="en-US"/>
+          </a:p>
+        </p:txBody>
+      </p:sp>
     </p:spTree>
   </p:cSld>
   <p:clrMapOvr>
@@ -657,6 +777,126 @@
           <a:chExt cx="0" cy="0"/>
         </a:xfrm>
       </p:grpSpPr>
+      <p:sp>
+        <p:nvSpPr>
+          <p:cNvPr id="2" name="Title Placeholder 1"/>
+          <p:cNvSpPr>
+            <a:spLocks noGrp="1"/>
+          </p:cNvSpPr>
+          <p:nvPr>
+            <p:ph type="title" idx="0"/>
+          </p:nvPr>
+        </p:nvSpPr>
+        <p:spPr>
+          <a:xfrm>
+            <a:off x="609600" y="274320"/>
+            <a:ext cx="10972800" cy="1028700"/>
+          </a:xfrm>
+        </p:spPr>
+        <p:txBody>
+          <a:bodyPr/>
+          <a:lstStyle/>
+          <a:p>
+            <a:endParaRPr lang="en-US"/>
+          </a:p>
+        </p:txBody>
+      </p:sp>
+      <p:sp>
+        <p:nvSpPr>
+          <p:cNvPr id="3" name="Obj Placeholder 2"/>
+          <p:cNvSpPr>
+            <a:spLocks noGrp="1"/>
+          </p:cNvSpPr>
+          <p:nvPr>
+            <p:ph type="obj" idx="1"/>
+          </p:nvPr>
+        </p:nvSpPr>
+        <p:spPr>
+          <a:xfrm>
+            <a:off x="609600" y="1577340"/>
+            <a:ext cx="10972800" cy="4389120"/>
+          </a:xfrm>
+        </p:spPr>
+        <p:txBody>
+          <a:bodyPr/>
+          <a:lstStyle/>
+          <a:p>
+            <a:endParaRPr lang="en-US"/>
+          </a:p>
+        </p:txBody>
+      </p:sp>
+      <p:sp>
+        <p:nvSpPr>
+          <p:cNvPr id="4" name="Dt Placeholder 3"/>
+          <p:cNvSpPr>
+            <a:spLocks noGrp="1"/>
+          </p:cNvSpPr>
+          <p:nvPr>
+            <p:ph type="dt" idx="10"/>
+          </p:nvPr>
+        </p:nvSpPr>
+        <p:spPr>
+          <a:xfrm>
+            <a:off x="609600" y="6309360"/>
+            <a:ext cx="3048000" cy="274320"/>
+          </a:xfrm>
+        </p:spPr>
+        <p:txBody>
+          <a:bodyPr/>
+          <a:lstStyle/>
+          <a:p>
+            <a:endParaRPr lang="en-US"/>
+          </a:p>
+        </p:txBody>
+      </p:sp>
+      <p:sp>
+        <p:nvSpPr>
+          <p:cNvPr id="5" name="Ftr Placeholder 4"/>
+          <p:cNvSpPr>
+            <a:spLocks noGrp="1"/>
+          </p:cNvSpPr>
+          <p:nvPr>
+            <p:ph type="ftr" idx="11"/>
+          </p:nvPr>
+        </p:nvSpPr>
+        <p:spPr>
+          <a:xfrm>
+            <a:off x="4023360" y="6309360"/>
+            <a:ext cx="4145280" cy="274320"/>
+          </a:xfrm>
+        </p:spPr>
+        <p:txBody>
+          <a:bodyPr/>
+          <a:lstStyle/>
+          <a:p>
+            <a:endParaRPr lang="en-US"/>
+          </a:p>
+        </p:txBody>
+      </p:sp>
+      <p:sp>
+        <p:nvSpPr>
+          <p:cNvPr id="6" name="SldNum Placeholder 5"/>
+          <p:cNvSpPr>
+            <a:spLocks noGrp="1"/>
+          </p:cNvSpPr>
+          <p:nvPr>
+            <p:ph type="sldNum" idx="12"/>
+          </p:nvPr>
+        </p:nvSpPr>
+        <p:spPr>
+          <a:xfrm>
+            <a:off x="9144000" y="6309360"/>
+            <a:ext cx="2438400" cy="274320"/>
+          </a:xfrm>
+        </p:spPr>
+        <p:txBody>
+          <a:bodyPr/>
+          <a:lstStyle/>
+          <a:p>
+            <a:endParaRPr lang="en-US"/>
+          </a:p>
+        </p:txBody>
+      </p:sp>
     </p:spTree>
   </p:cSld>
   <p:clrMapOvr>
@@ -682,6 +922,126 @@
           <a:chExt cx="0" cy="0"/>
         </a:xfrm>
       </p:grpSpPr>
+      <p:sp>
+        <p:nvSpPr>
+          <p:cNvPr id="2" name="Title Placeholder 1"/>
+          <p:cNvSpPr>
+            <a:spLocks noGrp="1"/>
+          </p:cNvSpPr>
+          <p:nvPr>
+            <p:ph type="title" idx="0"/>
+          </p:nvPr>
+        </p:nvSpPr>
+        <p:spPr>
+          <a:xfrm>
+            <a:off x="609600" y="274320"/>
+            <a:ext cx="10972800" cy="1028700"/>
+          </a:xfrm>
+        </p:spPr>
+        <p:txBody>
+          <a:bodyPr/>
+          <a:lstStyle/>
+          <a:p>
+            <a:endParaRPr lang="en-US"/>
+          </a:p>
+        </p:txBody>
+      </p:sp>
+      <p:sp>
+        <p:nvSpPr>
+          <p:cNvPr id="3" name="Obj Placeholder 2"/>
+          <p:cNvSpPr>
+            <a:spLocks noGrp="1"/>
+          </p:cNvSpPr>
+          <p:nvPr>
+            <p:ph type="obj" idx="1"/>
+          </p:nvPr>
+        </p:nvSpPr>
+        <p:spPr>
+          <a:xfrm>
+            <a:off x="609600" y="1577340"/>
+            <a:ext cx="10972800" cy="4389120"/>
+          </a:xfrm>
+        </p:spPr>
+        <p:txBody>
+          <a:bodyPr/>
+          <a:lstStyle/>
+          <a:p>
+            <a:endParaRPr lang="en-US"/>
+          </a:p>
+        </p:txBody>
+      </p:sp>
+      <p:sp>
+        <p:nvSpPr>
+          <p:cNvPr id="4" name="Dt Placeholder 3"/>
+          <p:cNvSpPr>
+            <a:spLocks noGrp="1"/>
+          </p:cNvSpPr>
+          <p:nvPr>
+            <p:ph type="dt" idx="10"/>
+          </p:nvPr>
+        </p:nvSpPr>
+        <p:spPr>
+          <a:xfrm>
+            <a:off x="609600" y="6309360"/>
+            <a:ext cx="3048000" cy="274320"/>
+          </a:xfrm>
+        </p:spPr>
+        <p:txBody>
+          <a:bodyPr/>
+          <a:lstStyle/>
+          <a:p>
+            <a:endParaRPr lang="en-US"/>
+          </a:p>
+        </p:txBody>
+      </p:sp>
+      <p:sp>
+        <p:nvSpPr>
+          <p:cNvPr id="5" name="Ftr Placeholder 4"/>
+          <p:cNvSpPr>
+            <a:spLocks noGrp="1"/>
+          </p:cNvSpPr>
+          <p:nvPr>
+            <p:ph type="ftr" idx="11"/>
+          </p:nvPr>
+        </p:nvSpPr>
+        <p:spPr>
+          <a:xfrm>
+            <a:off x="4023360" y="6309360"/>
+            <a:ext cx="4145280" cy="274320"/>
+          </a:xfrm>
+        </p:spPr>
+        <p:txBody>
+          <a:bodyPr/>
+          <a:lstStyle/>
+          <a:p>
+            <a:endParaRPr lang="en-US"/>
+          </a:p>
+        </p:txBody>
+      </p:sp>
+      <p:sp>
+        <p:nvSpPr>
+          <p:cNvPr id="6" name="SldNum Placeholder 5"/>
+          <p:cNvSpPr>
+            <a:spLocks noGrp="1"/>
+          </p:cNvSpPr>
+          <p:nvPr>
+            <p:ph type="sldNum" idx="12"/>
+          </p:nvPr>
+        </p:nvSpPr>
+        <p:spPr>
+          <a:xfrm>
+            <a:off x="9144000" y="6309360"/>
+            <a:ext cx="2438400" cy="274320"/>
+          </a:xfrm>
+        </p:spPr>
+        <p:txBody>
+          <a:bodyPr/>
+          <a:lstStyle/>
+          <a:p>
+            <a:endParaRPr lang="en-US"/>
+          </a:p>
+        </p:txBody>
+      </p:sp>
     </p:spTree>
   </p:cSld>
   <p:clrMapOvr>
@@ -707,6 +1067,126 @@
           <a:chExt cx="0" cy="0"/>
         </a:xfrm>
       </p:grpSpPr>
+      <p:sp>
+        <p:nvSpPr>
+          <p:cNvPr id="2" name="Title Placeholder 1"/>
+          <p:cNvSpPr>
+            <a:spLocks noGrp="1"/>
+          </p:cNvSpPr>
+          <p:nvPr>
+            <p:ph type="title" idx="0"/>
+          </p:nvPr>
+        </p:nvSpPr>
+        <p:spPr>
+          <a:xfrm>
+            <a:off x="609600" y="274320"/>
+            <a:ext cx="10972800" cy="1028700"/>
+          </a:xfrm>
+        </p:spPr>
+        <p:txBody>
+          <a:bodyPr/>
+          <a:lstStyle/>
+          <a:p>
+            <a:endParaRPr lang="en-US"/>
+          </a:p>
+        </p:txBody>
+      </p:sp>
+      <p:sp>
+        <p:nvSpPr>
+          <p:cNvPr id="3" name="Obj Placeholder 2"/>
+          <p:cNvSpPr>
+            <a:spLocks noGrp="1"/>
+          </p:cNvSpPr>
+          <p:nvPr>
+            <p:ph type="obj" idx="1"/>
+          </p:nvPr>
+        </p:nvSpPr>
+        <p:spPr>
+          <a:xfrm>
+            <a:off x="609600" y="1577340"/>
+            <a:ext cx="10972800" cy="4389120"/>
+          </a:xfrm>
+        </p:spPr>
+        <p:txBody>
+          <a:bodyPr/>
+          <a:lstStyle/>
+          <a:p>
+            <a:endParaRPr lang="en-US"/>
+          </a:p>
+        </p:txBody>
+      </p:sp>
+      <p:sp>
+        <p:nvSpPr>
+          <p:cNvPr id="4" name="Dt Placeholder 3"/>
+          <p:cNvSpPr>
+            <a:spLocks noGrp="1"/>
+          </p:cNvSpPr>
+          <p:nvPr>
+            <p:ph type="dt" idx="10"/>
+          </p:nvPr>
+        </p:nvSpPr>
+        <p:spPr>
+          <a:xfrm>
+            <a:off x="609600" y="6309360"/>
+            <a:ext cx="3048000" cy="274320"/>
+          </a:xfrm>
+        </p:spPr>
+        <p:txBody>
+          <a:bodyPr/>
+          <a:lstStyle/>
+          <a:p>
+            <a:endParaRPr lang="en-US"/>
+          </a:p>
+        </p:txBody>
+      </p:sp>
+      <p:sp>
+        <p:nvSpPr>
+          <p:cNvPr id="5" name="Ftr Placeholder 4"/>
+          <p:cNvSpPr>
+            <a:spLocks noGrp="1"/>
+          </p:cNvSpPr>
+          <p:nvPr>
+            <p:ph type="ftr" idx="11"/>
+          </p:nvPr>
+        </p:nvSpPr>
+        <p:spPr>
+          <a:xfrm>
+            <a:off x="4023360" y="6309360"/>
+            <a:ext cx="4145280" cy="274320"/>
+          </a:xfrm>
+        </p:spPr>
+        <p:txBody>
+          <a:bodyPr/>
+          <a:lstStyle/>
+          <a:p>
+            <a:endParaRPr lang="en-US"/>
+          </a:p>
+        </p:txBody>
+      </p:sp>
+      <p:sp>
+        <p:nvSpPr>
+          <p:cNvPr id="6" name="SldNum Placeholder 5"/>
+          <p:cNvSpPr>
+            <a:spLocks noGrp="1"/>
+          </p:cNvSpPr>
+          <p:nvPr>
+            <p:ph type="sldNum" idx="12"/>
+          </p:nvPr>
+        </p:nvSpPr>
+        <p:spPr>
+          <a:xfrm>
+            <a:off x="9144000" y="6309360"/>
+            <a:ext cx="2438400" cy="274320"/>
+          </a:xfrm>
+        </p:spPr>
+        <p:txBody>
+          <a:bodyPr/>
+          <a:lstStyle/>
+          <a:p>
+            <a:endParaRPr lang="en-US"/>
+          </a:p>
+        </p:txBody>
+      </p:sp>
     </p:spTree>
   </p:cSld>
   <p:clrMapOvr>
@@ -732,6 +1212,126 @@
           <a:chExt cx="0" cy="0"/>
         </a:xfrm>
       </p:grpSpPr>
+      <p:sp>
+        <p:nvSpPr>
+          <p:cNvPr id="2" name="Title Placeholder 1"/>
+          <p:cNvSpPr>
+            <a:spLocks noGrp="1"/>
+          </p:cNvSpPr>
+          <p:nvPr>
+            <p:ph type="title" idx="0"/>
+          </p:nvPr>
+        </p:nvSpPr>
+        <p:spPr>
+          <a:xfrm>
+            <a:off x="609600" y="2537460"/>
+            <a:ext cx="10972800" cy="1371600"/>
+          </a:xfrm>
+        </p:spPr>
+        <p:txBody>
+          <a:bodyPr/>
+          <a:lstStyle/>
+          <a:p>
+            <a:endParaRPr lang="en-US"/>
+          </a:p>
+        </p:txBody>
+      </p:sp>
+      <p:sp>
+        <p:nvSpPr>
+          <p:cNvPr id="3" name="Body Placeholder 2"/>
+          <p:cNvSpPr>
+            <a:spLocks noGrp="1"/>
+          </p:cNvSpPr>
+          <p:nvPr>
+            <p:ph type="body" idx="1"/>
+          </p:nvPr>
+        </p:nvSpPr>
+        <p:spPr>
+          <a:xfrm>
+            <a:off x="609600" y="4114800"/>
+            <a:ext cx="10972800" cy="1577340"/>
+          </a:xfrm>
+        </p:spPr>
+        <p:txBody>
+          <a:bodyPr/>
+          <a:lstStyle/>
+          <a:p>
+            <a:endParaRPr lang="en-US"/>
+          </a:p>
+        </p:txBody>
+      </p:sp>
+      <p:sp>
+        <p:nvSpPr>
+          <p:cNvPr id="4" name="Dt Placeholder 3"/>
+          <p:cNvSpPr>
+            <a:spLocks noGrp="1"/>
+          </p:cNvSpPr>
+          <p:nvPr>
+            <p:ph type="dt" idx="10"/>
+          </p:nvPr>
+        </p:nvSpPr>
+        <p:spPr>
+          <a:xfrm>
+            <a:off x="609600" y="6309360"/>
+            <a:ext cx="3048000" cy="274320"/>
+          </a:xfrm>
+        </p:spPr>
+        <p:txBody>
+          <a:bodyPr/>
+          <a:lstStyle/>
+          <a:p>
+            <a:endParaRPr lang="en-US"/>
+          </a:p>
+        </p:txBody>
+      </p:sp>
+      <p:sp>
+        <p:nvSpPr>
+          <p:cNvPr id="5" name="Ftr Placeholder 4"/>
+          <p:cNvSpPr>
+            <a:spLocks noGrp="1"/>
+          </p:cNvSpPr>
+          <p:nvPr>
+            <p:ph type="ftr" idx="11"/>
+          </p:nvPr>
+        </p:nvSpPr>
+        <p:spPr>
+          <a:xfrm>
+            <a:off x="4023360" y="6309360"/>
+            <a:ext cx="4145280" cy="274320"/>
+          </a:xfrm>
+        </p:spPr>
+        <p:txBody>
+          <a:bodyPr/>
+          <a:lstStyle/>
+          <a:p>
+            <a:endParaRPr lang="en-US"/>
+          </a:p>
+        </p:txBody>
+      </p:sp>
+      <p:sp>
+        <p:nvSpPr>
+          <p:cNvPr id="6" name="SldNum Placeholder 5"/>
+          <p:cNvSpPr>
+            <a:spLocks noGrp="1"/>
+          </p:cNvSpPr>
+          <p:nvPr>
+            <p:ph type="sldNum" idx="12"/>
+          </p:nvPr>
+        </p:nvSpPr>
+        <p:spPr>
+          <a:xfrm>
+            <a:off x="9144000" y="6309360"/>
+            <a:ext cx="2438400" cy="274320"/>
+          </a:xfrm>
+        </p:spPr>
+        <p:txBody>
+          <a:bodyPr/>
+          <a:lstStyle/>
+          <a:p>
+            <a:endParaRPr lang="en-US"/>
+          </a:p>
+        </p:txBody>
+      </p:sp>
     </p:spTree>
   </p:cSld>
   <p:clrMapOvr>
@@ -757,6 +1357,150 @@
           <a:chExt cx="0" cy="0"/>
         </a:xfrm>
       </p:grpSpPr>
+      <p:sp>
+        <p:nvSpPr>
+          <p:cNvPr id="2" name="Title Placeholder 1"/>
+          <p:cNvSpPr>
+            <a:spLocks noGrp="1"/>
+          </p:cNvSpPr>
+          <p:nvPr>
+            <p:ph type="title" idx="0"/>
+          </p:nvPr>
+        </p:nvSpPr>
+        <p:spPr>
+          <a:xfrm>
+            <a:off x="609600" y="274320"/>
+            <a:ext cx="10972800" cy="1028700"/>
+          </a:xfrm>
+        </p:spPr>
+        <p:txBody>
+          <a:bodyPr/>
+          <a:lstStyle/>
+          <a:p>
+            <a:endParaRPr lang="en-US"/>
+          </a:p>
+        </p:txBody>
+      </p:sp>
+      <p:sp>
+        <p:nvSpPr>
+          <p:cNvPr id="3" name="Obj Placeholder 2"/>
+          <p:cNvSpPr>
+            <a:spLocks noGrp="1"/>
+          </p:cNvSpPr>
+          <p:nvPr>
+            <p:ph type="obj" idx="1"/>
+          </p:nvPr>
+        </p:nvSpPr>
+        <p:spPr>
+          <a:xfrm>
+            <a:off x="609600" y="1851660"/>
+            <a:ext cx="5242560" cy="4114800"/>
+          </a:xfrm>
+        </p:spPr>
+        <p:txBody>
+          <a:bodyPr/>
+          <a:lstStyle/>
+          <a:p>
+            <a:endParaRPr lang="en-US"/>
+          </a:p>
+        </p:txBody>
+      </p:sp>
+      <p:sp>
+        <p:nvSpPr>
+          <p:cNvPr id="4" name="Obj Placeholder 3"/>
+          <p:cNvSpPr>
+            <a:spLocks noGrp="1"/>
+          </p:cNvSpPr>
+          <p:nvPr>
+            <p:ph type="obj" idx="2"/>
+          </p:nvPr>
+        </p:nvSpPr>
+        <p:spPr>
+          <a:xfrm>
+            <a:off x="6339840" y="1851660"/>
+            <a:ext cx="5242560" cy="4114800"/>
+          </a:xfrm>
+        </p:spPr>
+        <p:txBody>
+          <a:bodyPr/>
+          <a:lstStyle/>
+          <a:p>
+            <a:endParaRPr lang="en-US"/>
+          </a:p>
+        </p:txBody>
+      </p:sp>
+      <p:sp>
+        <p:nvSpPr>
+          <p:cNvPr id="5" name="Dt Placeholder 4"/>
+          <p:cNvSpPr>
+            <a:spLocks noGrp="1"/>
+          </p:cNvSpPr>
+          <p:nvPr>
+            <p:ph type="dt" idx="10"/>
+          </p:nvPr>
+        </p:nvSpPr>
+        <p:spPr>
+          <a:xfrm>
+            <a:off x="609600" y="6309360"/>
+            <a:ext cx="3048000" cy="274320"/>
+          </a:xfrm>
+        </p:spPr>
+        <p:txBody>
+          <a:bodyPr/>
+          <a:lstStyle/>
+          <a:p>
+            <a:endParaRPr lang="en-US"/>
+          </a:p>
+        </p:txBody>
+      </p:sp>
+      <p:sp>
+        <p:nvSpPr>
+          <p:cNvPr id="6" name="Ftr Placeholder 5"/>
+          <p:cNvSpPr>
+            <a:spLocks noGrp="1"/>
+          </p:cNvSpPr>
+          <p:nvPr>
+            <p:ph type="ftr" idx="11"/>
+          </p:nvPr>
+        </p:nvSpPr>
+        <p:spPr>
+          <a:xfrm>
+            <a:off x="4023360" y="6309360"/>
+            <a:ext cx="4145280" cy="274320"/>
+          </a:xfrm>
+        </p:spPr>
+        <p:txBody>
+          <a:bodyPr/>
+          <a:lstStyle/>
+          <a:p>
+            <a:endParaRPr lang="en-US"/>
+          </a:p>
+        </p:txBody>
+      </p:sp>
+      <p:sp>
+        <p:nvSpPr>
+          <p:cNvPr id="7" name="SldNum Placeholder 6"/>
+          <p:cNvSpPr>
+            <a:spLocks noGrp="1"/>
+          </p:cNvSpPr>
+          <p:nvPr>
+            <p:ph type="sldNum" idx="12"/>
+          </p:nvPr>
+        </p:nvSpPr>
+        <p:spPr>
+          <a:xfrm>
+            <a:off x="9144000" y="6309360"/>
+            <a:ext cx="2438400" cy="274320"/>
+          </a:xfrm>
+        </p:spPr>
+        <p:txBody>
+          <a:bodyPr/>
+          <a:lstStyle/>
+          <a:p>
+            <a:endParaRPr lang="en-US"/>
+          </a:p>
+        </p:txBody>
+      </p:sp>
     </p:spTree>
   </p:cSld>
   <p:clrMapOvr>
@@ -782,6 +1526,198 @@
           <a:chExt cx="0" cy="0"/>
         </a:xfrm>
       </p:grpSpPr>
+      <p:sp>
+        <p:nvSpPr>
+          <p:cNvPr id="2" name="Title Placeholder 1"/>
+          <p:cNvSpPr>
+            <a:spLocks noGrp="1"/>
+          </p:cNvSpPr>
+          <p:nvPr>
+            <p:ph type="title" idx="0"/>
+          </p:nvPr>
+        </p:nvSpPr>
+        <p:spPr>
+          <a:xfrm>
+            <a:off x="609600" y="274320"/>
+            <a:ext cx="10972800" cy="1028700"/>
+          </a:xfrm>
+        </p:spPr>
+        <p:txBody>
+          <a:bodyPr/>
+          <a:lstStyle/>
+          <a:p>
+            <a:endParaRPr lang="en-US"/>
+          </a:p>
+        </p:txBody>
+      </p:sp>
+      <p:sp>
+        <p:nvSpPr>
+          <p:cNvPr id="3" name="Obj Placeholder 2"/>
+          <p:cNvSpPr>
+            <a:spLocks noGrp="1"/>
+          </p:cNvSpPr>
+          <p:nvPr>
+            <p:ph type="obj" idx="1"/>
+          </p:nvPr>
+        </p:nvSpPr>
+        <p:spPr>
+          <a:xfrm>
+            <a:off x="609600" y="1851660"/>
+            <a:ext cx="5242560" cy="4114800"/>
+          </a:xfrm>
+        </p:spPr>
+        <p:txBody>
+          <a:bodyPr/>
+          <a:lstStyle/>
+          <a:p>
+            <a:endParaRPr lang="en-US"/>
+          </a:p>
+        </p:txBody>
+      </p:sp>
+      <p:sp>
+        <p:nvSpPr>
+          <p:cNvPr id="4" name="Obj Placeholder 3"/>
+          <p:cNvSpPr>
+            <a:spLocks noGrp="1"/>
+          </p:cNvSpPr>
+          <p:nvPr>
+            <p:ph type="obj" idx="2"/>
+          </p:nvPr>
+        </p:nvSpPr>
+        <p:spPr>
+          <a:xfrm>
+            <a:off x="6339840" y="1851660"/>
+            <a:ext cx="5242560" cy="4114800"/>
+          </a:xfrm>
+        </p:spPr>
+        <p:txBody>
+          <a:bodyPr/>
+          <a:lstStyle/>
+          <a:p>
+            <a:endParaRPr lang="en-US"/>
+          </a:p>
+        </p:txBody>
+      </p:sp>
+      <p:sp>
+        <p:nvSpPr>
+          <p:cNvPr id="5" name="Body Placeholder 4"/>
+          <p:cNvSpPr>
+            <a:spLocks noGrp="1"/>
+          </p:cNvSpPr>
+          <p:nvPr>
+            <p:ph type="body" idx="3"/>
+          </p:nvPr>
+        </p:nvSpPr>
+        <p:spPr>
+          <a:xfrm>
+            <a:off x="609600" y="1371600"/>
+            <a:ext cx="5242560" cy="480060"/>
+          </a:xfrm>
+        </p:spPr>
+        <p:txBody>
+          <a:bodyPr/>
+          <a:lstStyle/>
+          <a:p>
+            <a:endParaRPr lang="en-US"/>
+          </a:p>
+        </p:txBody>
+      </p:sp>
+      <p:sp>
+        <p:nvSpPr>
+          <p:cNvPr id="6" name="Body Placeholder 5"/>
+          <p:cNvSpPr>
+            <a:spLocks noGrp="1"/>
+          </p:cNvSpPr>
+          <p:nvPr>
+            <p:ph type="body" idx="4"/>
+          </p:nvPr>
+        </p:nvSpPr>
+        <p:spPr>
+          <a:xfrm>
+            <a:off x="6339840" y="1371600"/>
+            <a:ext cx="5242560" cy="480060"/>
+          </a:xfrm>
+        </p:spPr>
+        <p:txBody>
+          <a:bodyPr/>
+          <a:lstStyle/>
+          <a:p>
+            <a:endParaRPr lang="en-US"/>
+          </a:p>
+        </p:txBody>
+      </p:sp>
+      <p:sp>
+        <p:nvSpPr>
+          <p:cNvPr id="7" name="Dt Placeholder 6"/>
+          <p:cNvSpPr>
+            <a:spLocks noGrp="1"/>
+          </p:cNvSpPr>
+          <p:nvPr>
+            <p:ph type="dt" idx="10"/>
+          </p:nvPr>
+        </p:nvSpPr>
+        <p:spPr>
+          <a:xfrm>
+            <a:off x="609600" y="6309360"/>
+            <a:ext cx="3048000" cy="274320"/>
+          </a:xfrm>
+        </p:spPr>
+        <p:txBody>
+          <a:bodyPr/>
+          <a:lstStyle/>
+          <a:p>
+            <a:endParaRPr lang="en-US"/>
+          </a:p>
+        </p:txBody>
+      </p:sp>
+      <p:sp>
+        <p:nvSpPr>
+          <p:cNvPr id="8" name="Ftr Placeholder 7"/>
+          <p:cNvSpPr>
+            <a:spLocks noGrp="1"/>
+          </p:cNvSpPr>
+          <p:nvPr>
+            <p:ph type="ftr" idx="11"/>
+          </p:nvPr>
+        </p:nvSpPr>
+        <p:spPr>
+          <a:xfrm>
+            <a:off x="4023360" y="6309360"/>
+            <a:ext cx="4145280" cy="274320"/>
+          </a:xfrm>
+        </p:spPr>
+        <p:txBody>
+          <a:bodyPr/>
+          <a:lstStyle/>
+          <a:p>
+            <a:endParaRPr lang="en-US"/>
+          </a:p>
+        </p:txBody>
+      </p:sp>
+      <p:sp>
+        <p:nvSpPr>
+          <p:cNvPr id="9" name="SldNum Placeholder 8"/>
+          <p:cNvSpPr>
+            <a:spLocks noGrp="1"/>
+          </p:cNvSpPr>
+          <p:nvPr>
+            <p:ph type="sldNum" idx="12"/>
+          </p:nvPr>
+        </p:nvSpPr>
+        <p:spPr>
+          <a:xfrm>
+            <a:off x="9144000" y="6309360"/>
+            <a:ext cx="2438400" cy="274320"/>
+          </a:xfrm>
+        </p:spPr>
+        <p:txBody>
+          <a:bodyPr/>
+          <a:lstStyle/>
+          <a:p>
+            <a:endParaRPr lang="en-US"/>
+          </a:p>
+        </p:txBody>
+      </p:sp>
     </p:spTree>
   </p:cSld>
   <p:clrMapOvr>
@@ -807,6 +1743,102 @@
           <a:chExt cx="0" cy="0"/>
         </a:xfrm>
       </p:grpSpPr>
+      <p:sp>
+        <p:nvSpPr>
+          <p:cNvPr id="2" name="Title Placeholder 1"/>
+          <p:cNvSpPr>
+            <a:spLocks noGrp="1"/>
+          </p:cNvSpPr>
+          <p:nvPr>
+            <p:ph type="title" idx="0"/>
+          </p:nvPr>
+        </p:nvSpPr>
+        <p:spPr>
+          <a:xfrm>
+            <a:off x="609600" y="274320"/>
+            <a:ext cx="10972800" cy="1028700"/>
+          </a:xfrm>
+        </p:spPr>
+        <p:txBody>
+          <a:bodyPr/>
+          <a:lstStyle/>
+          <a:p>
+            <a:endParaRPr lang="en-US"/>
+          </a:p>
+        </p:txBody>
+      </p:sp>
+      <p:sp>
+        <p:nvSpPr>
+          <p:cNvPr id="3" name="Dt Placeholder 2"/>
+          <p:cNvSpPr>
+            <a:spLocks noGrp="1"/>
+          </p:cNvSpPr>
+          <p:nvPr>
+            <p:ph type="dt" idx="10"/>
+          </p:nvPr>
+        </p:nvSpPr>
+        <p:spPr>
+          <a:xfrm>
+            <a:off x="609600" y="6309360"/>
+            <a:ext cx="3048000" cy="274320"/>
+          </a:xfrm>
+        </p:spPr>
+        <p:txBody>
+          <a:bodyPr/>
+          <a:lstStyle/>
+          <a:p>
+            <a:endParaRPr lang="en-US"/>
+          </a:p>
+        </p:txBody>
+      </p:sp>
+      <p:sp>
+        <p:nvSpPr>
+          <p:cNvPr id="4" name="Ftr Placeholder 3"/>
+          <p:cNvSpPr>
+            <a:spLocks noGrp="1"/>
+          </p:cNvSpPr>
+          <p:nvPr>
+            <p:ph type="ftr" idx="11"/>
+          </p:nvPr>
+        </p:nvSpPr>
+        <p:spPr>
+          <a:xfrm>
+            <a:off x="4023360" y="6309360"/>
+            <a:ext cx="4145280" cy="274320"/>
+          </a:xfrm>
+        </p:spPr>
+        <p:txBody>
+          <a:bodyPr/>
+          <a:lstStyle/>
+          <a:p>
+            <a:endParaRPr lang="en-US"/>
+          </a:p>
+        </p:txBody>
+      </p:sp>
+      <p:sp>
+        <p:nvSpPr>
+          <p:cNvPr id="5" name="SldNum Placeholder 4"/>
+          <p:cNvSpPr>
+            <a:spLocks noGrp="1"/>
+          </p:cNvSpPr>
+          <p:nvPr>
+            <p:ph type="sldNum" idx="12"/>
+          </p:nvPr>
+        </p:nvSpPr>
+        <p:spPr>
+          <a:xfrm>
+            <a:off x="9144000" y="6309360"/>
+            <a:ext cx="2438400" cy="274320"/>
+          </a:xfrm>
+        </p:spPr>
+        <p:txBody>
+          <a:bodyPr/>
+          <a:lstStyle/>
+          <a:p>
+            <a:endParaRPr lang="en-US"/>
+          </a:p>
+        </p:txBody>
+      </p:sp>
     </p:spTree>
   </p:cSld>
   <p:clrMapOvr>
@@ -857,6 +1889,150 @@
           <a:chExt cx="0" cy="0"/>
         </a:xfrm>
       </p:grpSpPr>
+      <p:sp>
+        <p:nvSpPr>
+          <p:cNvPr id="2" name="Title Placeholder 1"/>
+          <p:cNvSpPr>
+            <a:spLocks noGrp="1"/>
+          </p:cNvSpPr>
+          <p:nvPr>
+            <p:ph type="title" idx="0"/>
+          </p:nvPr>
+        </p:nvSpPr>
+        <p:spPr>
+          <a:xfrm>
+            <a:off x="609600" y="274320"/>
+            <a:ext cx="10972800" cy="1028700"/>
+          </a:xfrm>
+        </p:spPr>
+        <p:txBody>
+          <a:bodyPr/>
+          <a:lstStyle/>
+          <a:p>
+            <a:endParaRPr lang="en-US"/>
+          </a:p>
+        </p:txBody>
+      </p:sp>
+      <p:sp>
+        <p:nvSpPr>
+          <p:cNvPr id="3" name="Obj Placeholder 2"/>
+          <p:cNvSpPr>
+            <a:spLocks noGrp="1"/>
+          </p:cNvSpPr>
+          <p:nvPr>
+            <p:ph type="obj" idx="1"/>
+          </p:nvPr>
+        </p:nvSpPr>
+        <p:spPr>
+          <a:xfrm>
+            <a:off x="4389120" y="1577340"/>
+            <a:ext cx="7193280" cy="4389120"/>
+          </a:xfrm>
+        </p:spPr>
+        <p:txBody>
+          <a:bodyPr/>
+          <a:lstStyle/>
+          <a:p>
+            <a:endParaRPr lang="en-US"/>
+          </a:p>
+        </p:txBody>
+      </p:sp>
+      <p:sp>
+        <p:nvSpPr>
+          <p:cNvPr id="4" name="Body Placeholder 3"/>
+          <p:cNvSpPr>
+            <a:spLocks noGrp="1"/>
+          </p:cNvSpPr>
+          <p:nvPr>
+            <p:ph type="body" idx="2"/>
+          </p:nvPr>
+        </p:nvSpPr>
+        <p:spPr>
+          <a:xfrm>
+            <a:off x="609600" y="1577340"/>
+            <a:ext cx="3291840" cy="4389120"/>
+          </a:xfrm>
+        </p:spPr>
+        <p:txBody>
+          <a:bodyPr/>
+          <a:lstStyle/>
+          <a:p>
+            <a:endParaRPr lang="en-US"/>
+          </a:p>
+        </p:txBody>
+      </p:sp>
+      <p:sp>
+        <p:nvSpPr>
+          <p:cNvPr id="5" name="Dt Placeholder 4"/>
+          <p:cNvSpPr>
+            <a:spLocks noGrp="1"/>
+          </p:cNvSpPr>
+          <p:nvPr>
+            <p:ph type="dt" idx="10"/>
+          </p:nvPr>
+        </p:nvSpPr>
+        <p:spPr>
+          <a:xfrm>
+            <a:off x="609600" y="6309360"/>
+            <a:ext cx="3048000" cy="274320"/>
+          </a:xfrm>
+        </p:spPr>
+        <p:txBody>
+          <a:bodyPr/>
+          <a:lstStyle/>
+          <a:p>
+            <a:endParaRPr lang="en-US"/>
+          </a:p>
+        </p:txBody>
+      </p:sp>
+      <p:sp>
+        <p:nvSpPr>
+          <p:cNvPr id="6" name="Ftr Placeholder 5"/>
+          <p:cNvSpPr>
+            <a:spLocks noGrp="1"/>
+          </p:cNvSpPr>
+          <p:nvPr>
+            <p:ph type="ftr" idx="11"/>
+          </p:nvPr>
+        </p:nvSpPr>
+        <p:spPr>
+          <a:xfrm>
+            <a:off x="4023360" y="6309360"/>
+            <a:ext cx="4145280" cy="274320"/>
+          </a:xfrm>
+        </p:spPr>
+        <p:txBody>
+          <a:bodyPr/>
+          <a:lstStyle/>
+          <a:p>
+            <a:endParaRPr lang="en-US"/>
+          </a:p>
+        </p:txBody>
+      </p:sp>
+      <p:sp>
+        <p:nvSpPr>
+          <p:cNvPr id="7" name="SldNum Placeholder 6"/>
+          <p:cNvSpPr>
+            <a:spLocks noGrp="1"/>
+          </p:cNvSpPr>
+          <p:nvPr>
+            <p:ph type="sldNum" idx="12"/>
+          </p:nvPr>
+        </p:nvSpPr>
+        <p:spPr>
+          <a:xfrm>
+            <a:off x="9144000" y="6309360"/>
+            <a:ext cx="2438400" cy="274320"/>
+          </a:xfrm>
+        </p:spPr>
+        <p:txBody>
+          <a:bodyPr/>
+          <a:lstStyle/>
+          <a:p>
+            <a:endParaRPr lang="en-US"/>
+          </a:p>
+        </p:txBody>
+      </p:sp>
     </p:spTree>
   </p:cSld>
   <p:clrMapOvr>
@@ -882,6 +2058,150 @@
           <a:chExt cx="0" cy="0"/>
         </a:xfrm>
       </p:grpSpPr>
+      <p:sp>
+        <p:nvSpPr>
+          <p:cNvPr id="2" name="Title Placeholder 1"/>
+          <p:cNvSpPr>
+            <a:spLocks noGrp="1"/>
+          </p:cNvSpPr>
+          <p:nvPr>
+            <p:ph type="title" idx="0"/>
+          </p:nvPr>
+        </p:nvSpPr>
+        <p:spPr>
+          <a:xfrm>
+            <a:off x="609600" y="274320"/>
+            <a:ext cx="10972800" cy="1028700"/>
+          </a:xfrm>
+        </p:spPr>
+        <p:txBody>
+          <a:bodyPr/>
+          <a:lstStyle/>
+          <a:p>
+            <a:endParaRPr lang="en-US"/>
+          </a:p>
+        </p:txBody>
+      </p:sp>
+      <p:sp>
+        <p:nvSpPr>
+          <p:cNvPr id="3" name="Pic Placeholder 2"/>
+          <p:cNvSpPr>
+            <a:spLocks noGrp="1"/>
+          </p:cNvSpPr>
+          <p:nvPr>
+            <p:ph type="pic" idx="1"/>
+          </p:nvPr>
+        </p:nvSpPr>
+        <p:spPr>
+          <a:xfrm>
+            <a:off x="4389120" y="1577340"/>
+            <a:ext cx="7193280" cy="4389120"/>
+          </a:xfrm>
+        </p:spPr>
+        <p:txBody>
+          <a:bodyPr/>
+          <a:lstStyle/>
+          <a:p>
+            <a:endParaRPr lang="en-US"/>
+          </a:p>
+        </p:txBody>
+      </p:sp>
+      <p:sp>
+        <p:nvSpPr>
+          <p:cNvPr id="4" name="Body Placeholder 3"/>
+          <p:cNvSpPr>
+            <a:spLocks noGrp="1"/>
+          </p:cNvSpPr>
+          <p:nvPr>
+            <p:ph type="body" idx="2"/>
+          </p:nvPr>
+        </p:nvSpPr>
+        <p:spPr>
+          <a:xfrm>
+            <a:off x="609600" y="1577340"/>
+            <a:ext cx="3291840" cy="4389120"/>
+          </a:xfrm>
+        </p:spPr>
+        <p:txBody>
+          <a:bodyPr/>
+          <a:lstStyle/>
+          <a:p>
+            <a:endParaRPr lang="en-US"/>
+          </a:p>
+        </p:txBody>
+      </p:sp>
+      <p:sp>
+        <p:nvSpPr>
+          <p:cNvPr id="5" name="Dt Placeholder 4"/>
+          <p:cNvSpPr>
+            <a:spLocks noGrp="1"/>
+          </p:cNvSpPr>
+          <p:nvPr>
+            <p:ph type="dt" idx="10"/>
+          </p:nvPr>
+        </p:nvSpPr>
+        <p:spPr>
+          <a:xfrm>
+            <a:off x="609600" y="6309360"/>
+            <a:ext cx="3048000" cy="274320"/>
+          </a:xfrm>
+        </p:spPr>
+        <p:txBody>
+          <a:bodyPr/>
+          <a:lstStyle/>
+          <a:p>
+            <a:endParaRPr lang="en-US"/>
+          </a:p>
+        </p:txBody>
+      </p:sp>
+      <p:sp>
+        <p:nvSpPr>
+          <p:cNvPr id="6" name="Ftr Placeholder 5"/>
+          <p:cNvSpPr>
+            <a:spLocks noGrp="1"/>
+          </p:cNvSpPr>
+          <p:nvPr>
+            <p:ph type="ftr" idx="11"/>
+          </p:nvPr>
+        </p:nvSpPr>
+        <p:spPr>
+          <a:xfrm>
+            <a:off x="4023360" y="6309360"/>
+            <a:ext cx="4145280" cy="274320"/>
+          </a:xfrm>
+        </p:spPr>
+        <p:txBody>
+          <a:bodyPr/>
+          <a:lstStyle/>
+          <a:p>
+            <a:endParaRPr lang="en-US"/>
+          </a:p>
+        </p:txBody>
+      </p:sp>
+      <p:sp>
+        <p:nvSpPr>
+          <p:cNvPr id="7" name="SldNum Placeholder 6"/>
+          <p:cNvSpPr>
+            <a:spLocks noGrp="1"/>
+          </p:cNvSpPr>
+          <p:nvPr>
+            <p:ph type="sldNum" idx="12"/>
+          </p:nvPr>
+        </p:nvSpPr>
+        <p:spPr>
+          <a:xfrm>
+            <a:off x="9144000" y="6309360"/>
+            <a:ext cx="2438400" cy="274320"/>
+          </a:xfrm>
+        </p:spPr>
+        <p:txBody>
+          <a:bodyPr/>
+          <a:lstStyle/>
+          <a:p>
+            <a:endParaRPr lang="en-US"/>
+          </a:p>
+        </p:txBody>
+      </p:sp>
     </p:spTree>
   </p:cSld>
   <p:clrMapOvr>

--- a/e2e/pptx/fixtures/smartart-build-reveal.pptx
+++ b/e2e/pptx/fixtures/smartart-build-reveal.pptx
@@ -288,9 +288,9 @@
           </a:avLst>
         </a:prstGeom>
         <a:solidFill>
-          <a:srgbClr val="4472C4"/>
+          <a:srgbClr xmlns:a="http://schemas.openxmlformats.org/drawingml/2006/main" val="4472C4"/>
         </a:solidFill>
-        <a:ln w="12700">
+        <a:ln xmlns:a="http://schemas.openxmlformats.org/drawingml/2006/main" w="12700">
           <a:solidFill>
             <a:srgbClr val="698ED0"/>
           </a:solidFill>
@@ -349,9 +349,9 @@
           </a:avLst>
         </a:prstGeom>
         <a:solidFill>
-          <a:srgbClr val="ED7D31"/>
+          <a:srgbClr xmlns:a="http://schemas.openxmlformats.org/drawingml/2006/main" val="ED7D31"/>
         </a:solidFill>
-        <a:ln w="12700">
+        <a:ln xmlns:a="http://schemas.openxmlformats.org/drawingml/2006/main" w="12700">
           <a:solidFill>
             <a:srgbClr val="F1975A"/>
           </a:solidFill>
@@ -410,9 +410,9 @@
           </a:avLst>
         </a:prstGeom>
         <a:solidFill>
-          <a:srgbClr val="A5A5A5"/>
+          <a:srgbClr xmlns:a="http://schemas.openxmlformats.org/drawingml/2006/main" val="A5A5A5"/>
         </a:solidFill>
-        <a:ln w="12700">
+        <a:ln xmlns:a="http://schemas.openxmlformats.org/drawingml/2006/main" w="12700">
           <a:solidFill>
             <a:srgbClr val="B7B7B7"/>
           </a:solidFill>
